--- a/kriptografia-kurzus.pptx
+++ b/kriptografia-kurzus.pptx
@@ -3250,7 +3250,7 @@
                   <a:schemeClr val="bg1"/>
                 </a:solidFill>
               </a:rPr>
-              <a:t>Weboldal: [ide kerül a weblap címe]</a:t>
+              <a:t>Weboldal: https://laszlop0921-web.github.io/kriptografia/</a:t>
             </a:r>
             <a:endParaRPr lang="en-US" sz="1600" dirty="0"/>
           </a:p>
